--- a/assets/img/pics2.pptx
+++ b/assets/img/pics2.pptx
@@ -6,6 +6,7 @@
   </p:sldMasterIdLst>
   <p:sldIdLst>
     <p:sldId id="259" r:id="rId2"/>
+    <p:sldId id="261" r:id="rId3"/>
   </p:sldIdLst>
   <p:sldSz cx="12192000" cy="6858000"/>
   <p:notesSz cx="6858000" cy="9144000"/>
@@ -165,10 +166,9 @@
           </a:lstStyle>
           <a:p>
             <a:r>
-              <a:rPr lang="en-US" smtClean="0"/>
+              <a:rPr lang="en-US"/>
               <a:t>Click to edit Master title style</a:t>
             </a:r>
-            <a:endParaRPr lang="en-US"/>
           </a:p>
         </p:txBody>
       </p:sp>
@@ -230,10 +230,9 @@
           </a:lstStyle>
           <a:p>
             <a:r>
-              <a:rPr lang="en-US" smtClean="0"/>
+              <a:rPr lang="en-US"/>
               <a:t>Click to edit Master subtitle style</a:t>
             </a:r>
-            <a:endParaRPr lang="en-US"/>
           </a:p>
         </p:txBody>
       </p:sp>
@@ -254,7 +253,7 @@
           <a:p>
             <a:fld id="{0D756A92-6B81-42FA-9FD3-B13034B3C042}" type="datetimeFigureOut">
               <a:rPr lang="en-US" smtClean="0"/>
-              <a:t>3/3/2020</a:t>
+              <a:t>3/1/2026</a:t>
             </a:fld>
             <a:endParaRPr lang="en-US"/>
           </a:p>
@@ -348,10 +347,9 @@
           <a:lstStyle/>
           <a:p>
             <a:r>
-              <a:rPr lang="en-US" smtClean="0"/>
+              <a:rPr lang="en-US"/>
               <a:t>Click to edit Master title style</a:t>
             </a:r>
-            <a:endParaRPr lang="en-US"/>
           </a:p>
         </p:txBody>
       </p:sp>
@@ -372,38 +370,37 @@
           <a:p>
             <a:pPr lvl="0"/>
             <a:r>
-              <a:rPr lang="en-US" smtClean="0"/>
+              <a:rPr lang="en-US"/>
               <a:t>Edit Master text styles</a:t>
             </a:r>
           </a:p>
           <a:p>
             <a:pPr lvl="1"/>
             <a:r>
-              <a:rPr lang="en-US" smtClean="0"/>
+              <a:rPr lang="en-US"/>
               <a:t>Second level</a:t>
             </a:r>
           </a:p>
           <a:p>
             <a:pPr lvl="2"/>
             <a:r>
-              <a:rPr lang="en-US" smtClean="0"/>
+              <a:rPr lang="en-US"/>
               <a:t>Third level</a:t>
             </a:r>
           </a:p>
           <a:p>
             <a:pPr lvl="3"/>
             <a:r>
-              <a:rPr lang="en-US" smtClean="0"/>
+              <a:rPr lang="en-US"/>
               <a:t>Fourth level</a:t>
             </a:r>
           </a:p>
           <a:p>
             <a:pPr lvl="4"/>
             <a:r>
-              <a:rPr lang="en-US" smtClean="0"/>
+              <a:rPr lang="en-US"/>
               <a:t>Fifth level</a:t>
             </a:r>
-            <a:endParaRPr lang="en-US"/>
           </a:p>
         </p:txBody>
       </p:sp>
@@ -424,7 +421,7 @@
           <a:p>
             <a:fld id="{0D756A92-6B81-42FA-9FD3-B13034B3C042}" type="datetimeFigureOut">
               <a:rPr lang="en-US" smtClean="0"/>
-              <a:t>3/3/2020</a:t>
+              <a:t>3/1/2026</a:t>
             </a:fld>
             <a:endParaRPr lang="en-US"/>
           </a:p>
@@ -523,10 +520,9 @@
           <a:lstStyle/>
           <a:p>
             <a:r>
-              <a:rPr lang="en-US" smtClean="0"/>
+              <a:rPr lang="en-US"/>
               <a:t>Click to edit Master title style</a:t>
             </a:r>
-            <a:endParaRPr lang="en-US"/>
           </a:p>
         </p:txBody>
       </p:sp>
@@ -552,38 +548,37 @@
           <a:p>
             <a:pPr lvl="0"/>
             <a:r>
-              <a:rPr lang="en-US" smtClean="0"/>
+              <a:rPr lang="en-US"/>
               <a:t>Edit Master text styles</a:t>
             </a:r>
           </a:p>
           <a:p>
             <a:pPr lvl="1"/>
             <a:r>
-              <a:rPr lang="en-US" smtClean="0"/>
+              <a:rPr lang="en-US"/>
               <a:t>Second level</a:t>
             </a:r>
           </a:p>
           <a:p>
             <a:pPr lvl="2"/>
             <a:r>
-              <a:rPr lang="en-US" smtClean="0"/>
+              <a:rPr lang="en-US"/>
               <a:t>Third level</a:t>
             </a:r>
           </a:p>
           <a:p>
             <a:pPr lvl="3"/>
             <a:r>
-              <a:rPr lang="en-US" smtClean="0"/>
+              <a:rPr lang="en-US"/>
               <a:t>Fourth level</a:t>
             </a:r>
           </a:p>
           <a:p>
             <a:pPr lvl="4"/>
             <a:r>
-              <a:rPr lang="en-US" smtClean="0"/>
+              <a:rPr lang="en-US"/>
               <a:t>Fifth level</a:t>
             </a:r>
-            <a:endParaRPr lang="en-US"/>
           </a:p>
         </p:txBody>
       </p:sp>
@@ -604,7 +599,7 @@
           <a:p>
             <a:fld id="{0D756A92-6B81-42FA-9FD3-B13034B3C042}" type="datetimeFigureOut">
               <a:rPr lang="en-US" smtClean="0"/>
-              <a:t>3/3/2020</a:t>
+              <a:t>3/1/2026</a:t>
             </a:fld>
             <a:endParaRPr lang="en-US"/>
           </a:p>
@@ -698,10 +693,9 @@
           <a:lstStyle/>
           <a:p>
             <a:r>
-              <a:rPr lang="en-US" smtClean="0"/>
+              <a:rPr lang="en-US"/>
               <a:t>Click to edit Master title style</a:t>
             </a:r>
-            <a:endParaRPr lang="en-US"/>
           </a:p>
         </p:txBody>
       </p:sp>
@@ -722,38 +716,37 @@
           <a:p>
             <a:pPr lvl="0"/>
             <a:r>
-              <a:rPr lang="en-US" smtClean="0"/>
+              <a:rPr lang="en-US"/>
               <a:t>Edit Master text styles</a:t>
             </a:r>
           </a:p>
           <a:p>
             <a:pPr lvl="1"/>
             <a:r>
-              <a:rPr lang="en-US" smtClean="0"/>
+              <a:rPr lang="en-US"/>
               <a:t>Second level</a:t>
             </a:r>
           </a:p>
           <a:p>
             <a:pPr lvl="2"/>
             <a:r>
-              <a:rPr lang="en-US" smtClean="0"/>
+              <a:rPr lang="en-US"/>
               <a:t>Third level</a:t>
             </a:r>
           </a:p>
           <a:p>
             <a:pPr lvl="3"/>
             <a:r>
-              <a:rPr lang="en-US" smtClean="0"/>
+              <a:rPr lang="en-US"/>
               <a:t>Fourth level</a:t>
             </a:r>
           </a:p>
           <a:p>
             <a:pPr lvl="4"/>
             <a:r>
-              <a:rPr lang="en-US" smtClean="0"/>
+              <a:rPr lang="en-US"/>
               <a:t>Fifth level</a:t>
             </a:r>
-            <a:endParaRPr lang="en-US"/>
           </a:p>
         </p:txBody>
       </p:sp>
@@ -774,7 +767,7 @@
           <a:p>
             <a:fld id="{0D756A92-6B81-42FA-9FD3-B13034B3C042}" type="datetimeFigureOut">
               <a:rPr lang="en-US" smtClean="0"/>
-              <a:t>3/3/2020</a:t>
+              <a:t>3/1/2026</a:t>
             </a:fld>
             <a:endParaRPr lang="en-US"/>
           </a:p>
@@ -877,10 +870,9 @@
           </a:lstStyle>
           <a:p>
             <a:r>
-              <a:rPr lang="en-US" smtClean="0"/>
+              <a:rPr lang="en-US"/>
               <a:t>Click to edit Master title style</a:t>
             </a:r>
-            <a:endParaRPr lang="en-US"/>
           </a:p>
         </p:txBody>
       </p:sp>
@@ -997,7 +989,7 @@
           <a:p>
             <a:pPr lvl="0"/>
             <a:r>
-              <a:rPr lang="en-US" smtClean="0"/>
+              <a:rPr lang="en-US"/>
               <a:t>Edit Master text styles</a:t>
             </a:r>
           </a:p>
@@ -1020,7 +1012,7 @@
           <a:p>
             <a:fld id="{0D756A92-6B81-42FA-9FD3-B13034B3C042}" type="datetimeFigureOut">
               <a:rPr lang="en-US" smtClean="0"/>
-              <a:t>3/3/2020</a:t>
+              <a:t>3/1/2026</a:t>
             </a:fld>
             <a:endParaRPr lang="en-US"/>
           </a:p>
@@ -1114,10 +1106,9 @@
           <a:lstStyle/>
           <a:p>
             <a:r>
-              <a:rPr lang="en-US" smtClean="0"/>
+              <a:rPr lang="en-US"/>
               <a:t>Click to edit Master title style</a:t>
             </a:r>
-            <a:endParaRPr lang="en-US"/>
           </a:p>
         </p:txBody>
       </p:sp>
@@ -1143,38 +1134,37 @@
           <a:p>
             <a:pPr lvl="0"/>
             <a:r>
-              <a:rPr lang="en-US" smtClean="0"/>
+              <a:rPr lang="en-US"/>
               <a:t>Edit Master text styles</a:t>
             </a:r>
           </a:p>
           <a:p>
             <a:pPr lvl="1"/>
             <a:r>
-              <a:rPr lang="en-US" smtClean="0"/>
+              <a:rPr lang="en-US"/>
               <a:t>Second level</a:t>
             </a:r>
           </a:p>
           <a:p>
             <a:pPr lvl="2"/>
             <a:r>
-              <a:rPr lang="en-US" smtClean="0"/>
+              <a:rPr lang="en-US"/>
               <a:t>Third level</a:t>
             </a:r>
           </a:p>
           <a:p>
             <a:pPr lvl="3"/>
             <a:r>
-              <a:rPr lang="en-US" smtClean="0"/>
+              <a:rPr lang="en-US"/>
               <a:t>Fourth level</a:t>
             </a:r>
           </a:p>
           <a:p>
             <a:pPr lvl="4"/>
             <a:r>
-              <a:rPr lang="en-US" smtClean="0"/>
+              <a:rPr lang="en-US"/>
               <a:t>Fifth level</a:t>
             </a:r>
-            <a:endParaRPr lang="en-US"/>
           </a:p>
         </p:txBody>
       </p:sp>
@@ -1200,38 +1190,37 @@
           <a:p>
             <a:pPr lvl="0"/>
             <a:r>
-              <a:rPr lang="en-US" smtClean="0"/>
+              <a:rPr lang="en-US"/>
               <a:t>Edit Master text styles</a:t>
             </a:r>
           </a:p>
           <a:p>
             <a:pPr lvl="1"/>
             <a:r>
-              <a:rPr lang="en-US" smtClean="0"/>
+              <a:rPr lang="en-US"/>
               <a:t>Second level</a:t>
             </a:r>
           </a:p>
           <a:p>
             <a:pPr lvl="2"/>
             <a:r>
-              <a:rPr lang="en-US" smtClean="0"/>
+              <a:rPr lang="en-US"/>
               <a:t>Third level</a:t>
             </a:r>
           </a:p>
           <a:p>
             <a:pPr lvl="3"/>
             <a:r>
-              <a:rPr lang="en-US" smtClean="0"/>
+              <a:rPr lang="en-US"/>
               <a:t>Fourth level</a:t>
             </a:r>
           </a:p>
           <a:p>
             <a:pPr lvl="4"/>
             <a:r>
-              <a:rPr lang="en-US" smtClean="0"/>
+              <a:rPr lang="en-US"/>
               <a:t>Fifth level</a:t>
             </a:r>
-            <a:endParaRPr lang="en-US"/>
           </a:p>
         </p:txBody>
       </p:sp>
@@ -1252,7 +1241,7 @@
           <a:p>
             <a:fld id="{0D756A92-6B81-42FA-9FD3-B13034B3C042}" type="datetimeFigureOut">
               <a:rPr lang="en-US" smtClean="0"/>
-              <a:t>3/3/2020</a:t>
+              <a:t>3/1/2026</a:t>
             </a:fld>
             <a:endParaRPr lang="en-US"/>
           </a:p>
@@ -1351,10 +1340,9 @@
           <a:lstStyle/>
           <a:p>
             <a:r>
-              <a:rPr lang="en-US" smtClean="0"/>
+              <a:rPr lang="en-US"/>
               <a:t>Click to edit Master title style</a:t>
             </a:r>
-            <a:endParaRPr lang="en-US"/>
           </a:p>
         </p:txBody>
       </p:sp>
@@ -1417,7 +1405,7 @@
           <a:p>
             <a:pPr lvl="0"/>
             <a:r>
-              <a:rPr lang="en-US" smtClean="0"/>
+              <a:rPr lang="en-US"/>
               <a:t>Edit Master text styles</a:t>
             </a:r>
           </a:p>
@@ -1445,38 +1433,37 @@
           <a:p>
             <a:pPr lvl="0"/>
             <a:r>
-              <a:rPr lang="en-US" smtClean="0"/>
+              <a:rPr lang="en-US"/>
               <a:t>Edit Master text styles</a:t>
             </a:r>
           </a:p>
           <a:p>
             <a:pPr lvl="1"/>
             <a:r>
-              <a:rPr lang="en-US" smtClean="0"/>
+              <a:rPr lang="en-US"/>
               <a:t>Second level</a:t>
             </a:r>
           </a:p>
           <a:p>
             <a:pPr lvl="2"/>
             <a:r>
-              <a:rPr lang="en-US" smtClean="0"/>
+              <a:rPr lang="en-US"/>
               <a:t>Third level</a:t>
             </a:r>
           </a:p>
           <a:p>
             <a:pPr lvl="3"/>
             <a:r>
-              <a:rPr lang="en-US" smtClean="0"/>
+              <a:rPr lang="en-US"/>
               <a:t>Fourth level</a:t>
             </a:r>
           </a:p>
           <a:p>
             <a:pPr lvl="4"/>
             <a:r>
-              <a:rPr lang="en-US" smtClean="0"/>
+              <a:rPr lang="en-US"/>
               <a:t>Fifth level</a:t>
             </a:r>
-            <a:endParaRPr lang="en-US"/>
           </a:p>
         </p:txBody>
       </p:sp>
@@ -1539,7 +1526,7 @@
           <a:p>
             <a:pPr lvl="0"/>
             <a:r>
-              <a:rPr lang="en-US" smtClean="0"/>
+              <a:rPr lang="en-US"/>
               <a:t>Edit Master text styles</a:t>
             </a:r>
           </a:p>
@@ -1567,38 +1554,37 @@
           <a:p>
             <a:pPr lvl="0"/>
             <a:r>
-              <a:rPr lang="en-US" smtClean="0"/>
+              <a:rPr lang="en-US"/>
               <a:t>Edit Master text styles</a:t>
             </a:r>
           </a:p>
           <a:p>
             <a:pPr lvl="1"/>
             <a:r>
-              <a:rPr lang="en-US" smtClean="0"/>
+              <a:rPr lang="en-US"/>
               <a:t>Second level</a:t>
             </a:r>
           </a:p>
           <a:p>
             <a:pPr lvl="2"/>
             <a:r>
-              <a:rPr lang="en-US" smtClean="0"/>
+              <a:rPr lang="en-US"/>
               <a:t>Third level</a:t>
             </a:r>
           </a:p>
           <a:p>
             <a:pPr lvl="3"/>
             <a:r>
-              <a:rPr lang="en-US" smtClean="0"/>
+              <a:rPr lang="en-US"/>
               <a:t>Fourth level</a:t>
             </a:r>
           </a:p>
           <a:p>
             <a:pPr lvl="4"/>
             <a:r>
-              <a:rPr lang="en-US" smtClean="0"/>
+              <a:rPr lang="en-US"/>
               <a:t>Fifth level</a:t>
             </a:r>
-            <a:endParaRPr lang="en-US"/>
           </a:p>
         </p:txBody>
       </p:sp>
@@ -1619,7 +1605,7 @@
           <a:p>
             <a:fld id="{0D756A92-6B81-42FA-9FD3-B13034B3C042}" type="datetimeFigureOut">
               <a:rPr lang="en-US" smtClean="0"/>
-              <a:t>3/3/2020</a:t>
+              <a:t>3/1/2026</a:t>
             </a:fld>
             <a:endParaRPr lang="en-US"/>
           </a:p>
@@ -1713,10 +1699,9 @@
           <a:lstStyle/>
           <a:p>
             <a:r>
-              <a:rPr lang="en-US" smtClean="0"/>
+              <a:rPr lang="en-US"/>
               <a:t>Click to edit Master title style</a:t>
             </a:r>
-            <a:endParaRPr lang="en-US"/>
           </a:p>
         </p:txBody>
       </p:sp>
@@ -1737,7 +1722,7 @@
           <a:p>
             <a:fld id="{0D756A92-6B81-42FA-9FD3-B13034B3C042}" type="datetimeFigureOut">
               <a:rPr lang="en-US" smtClean="0"/>
-              <a:t>3/3/2020</a:t>
+              <a:t>3/1/2026</a:t>
             </a:fld>
             <a:endParaRPr lang="en-US"/>
           </a:p>
@@ -1832,7 +1817,7 @@
           <a:p>
             <a:fld id="{0D756A92-6B81-42FA-9FD3-B13034B3C042}" type="datetimeFigureOut">
               <a:rPr lang="en-US" smtClean="0"/>
-              <a:t>3/3/2020</a:t>
+              <a:t>3/1/2026</a:t>
             </a:fld>
             <a:endParaRPr lang="en-US"/>
           </a:p>
@@ -1935,10 +1920,9 @@
           </a:lstStyle>
           <a:p>
             <a:r>
-              <a:rPr lang="en-US" smtClean="0"/>
+              <a:rPr lang="en-US"/>
               <a:t>Click to edit Master title style</a:t>
             </a:r>
-            <a:endParaRPr lang="en-US"/>
           </a:p>
         </p:txBody>
       </p:sp>
@@ -1992,38 +1976,37 @@
           <a:p>
             <a:pPr lvl="0"/>
             <a:r>
-              <a:rPr lang="en-US" smtClean="0"/>
+              <a:rPr lang="en-US"/>
               <a:t>Edit Master text styles</a:t>
             </a:r>
           </a:p>
           <a:p>
             <a:pPr lvl="1"/>
             <a:r>
-              <a:rPr lang="en-US" smtClean="0"/>
+              <a:rPr lang="en-US"/>
               <a:t>Second level</a:t>
             </a:r>
           </a:p>
           <a:p>
             <a:pPr lvl="2"/>
             <a:r>
-              <a:rPr lang="en-US" smtClean="0"/>
+              <a:rPr lang="en-US"/>
               <a:t>Third level</a:t>
             </a:r>
           </a:p>
           <a:p>
             <a:pPr lvl="3"/>
             <a:r>
-              <a:rPr lang="en-US" smtClean="0"/>
+              <a:rPr lang="en-US"/>
               <a:t>Fourth level</a:t>
             </a:r>
           </a:p>
           <a:p>
             <a:pPr lvl="4"/>
             <a:r>
-              <a:rPr lang="en-US" smtClean="0"/>
+              <a:rPr lang="en-US"/>
               <a:t>Fifth level</a:t>
             </a:r>
-            <a:endParaRPr lang="en-US"/>
           </a:p>
         </p:txBody>
       </p:sp>
@@ -2086,7 +2069,7 @@
           <a:p>
             <a:pPr lvl="0"/>
             <a:r>
-              <a:rPr lang="en-US" smtClean="0"/>
+              <a:rPr lang="en-US"/>
               <a:t>Edit Master text styles</a:t>
             </a:r>
           </a:p>
@@ -2109,7 +2092,7 @@
           <a:p>
             <a:fld id="{0D756A92-6B81-42FA-9FD3-B13034B3C042}" type="datetimeFigureOut">
               <a:rPr lang="en-US" smtClean="0"/>
-              <a:t>3/3/2020</a:t>
+              <a:t>3/1/2026</a:t>
             </a:fld>
             <a:endParaRPr lang="en-US"/>
           </a:p>
@@ -2212,10 +2195,9 @@
           </a:lstStyle>
           <a:p>
             <a:r>
-              <a:rPr lang="en-US" smtClean="0"/>
+              <a:rPr lang="en-US"/>
               <a:t>Click to edit Master title style</a:t>
             </a:r>
-            <a:endParaRPr lang="en-US"/>
           </a:p>
         </p:txBody>
       </p:sp>
@@ -2339,7 +2321,7 @@
           <a:p>
             <a:pPr lvl="0"/>
             <a:r>
-              <a:rPr lang="en-US" smtClean="0"/>
+              <a:rPr lang="en-US"/>
               <a:t>Edit Master text styles</a:t>
             </a:r>
           </a:p>
@@ -2362,7 +2344,7 @@
           <a:p>
             <a:fld id="{0D756A92-6B81-42FA-9FD3-B13034B3C042}" type="datetimeFigureOut">
               <a:rPr lang="en-US" smtClean="0"/>
-              <a:t>3/3/2020</a:t>
+              <a:t>3/1/2026</a:t>
             </a:fld>
             <a:endParaRPr lang="en-US"/>
           </a:p>
@@ -2471,10 +2453,9 @@
           <a:lstStyle/>
           <a:p>
             <a:r>
-              <a:rPr lang="en-US" smtClean="0"/>
+              <a:rPr lang="en-US"/>
               <a:t>Click to edit Master title style</a:t>
             </a:r>
-            <a:endParaRPr lang="en-US"/>
           </a:p>
         </p:txBody>
       </p:sp>
@@ -2505,38 +2486,37 @@
           <a:p>
             <a:pPr lvl="0"/>
             <a:r>
-              <a:rPr lang="en-US" smtClean="0"/>
+              <a:rPr lang="en-US"/>
               <a:t>Edit Master text styles</a:t>
             </a:r>
           </a:p>
           <a:p>
             <a:pPr lvl="1"/>
             <a:r>
-              <a:rPr lang="en-US" smtClean="0"/>
+              <a:rPr lang="en-US"/>
               <a:t>Second level</a:t>
             </a:r>
           </a:p>
           <a:p>
             <a:pPr lvl="2"/>
             <a:r>
-              <a:rPr lang="en-US" smtClean="0"/>
+              <a:rPr lang="en-US"/>
               <a:t>Third level</a:t>
             </a:r>
           </a:p>
           <a:p>
             <a:pPr lvl="3"/>
             <a:r>
-              <a:rPr lang="en-US" smtClean="0"/>
+              <a:rPr lang="en-US"/>
               <a:t>Fourth level</a:t>
             </a:r>
           </a:p>
           <a:p>
             <a:pPr lvl="4"/>
             <a:r>
-              <a:rPr lang="en-US" smtClean="0"/>
+              <a:rPr lang="en-US"/>
               <a:t>Fifth level</a:t>
             </a:r>
-            <a:endParaRPr lang="en-US"/>
           </a:p>
         </p:txBody>
       </p:sp>
@@ -2575,7 +2555,7 @@
           <a:p>
             <a:fld id="{0D756A92-6B81-42FA-9FD3-B13034B3C042}" type="datetimeFigureOut">
               <a:rPr lang="en-US" smtClean="0"/>
-              <a:t>3/3/2020</a:t>
+              <a:t>3/1/2026</a:t>
             </a:fld>
             <a:endParaRPr lang="en-US"/>
           </a:p>
@@ -3226,10 +3206,781 @@
           </a:prstGeom>
         </p:spPr>
       </p:pic>
+      <p:pic>
+        <p:nvPicPr>
+          <p:cNvPr id="3" name="Picture 2">
+            <a:extLst>
+              <a:ext uri="{FF2B5EF4-FFF2-40B4-BE49-F238E27FC236}">
+                <a16:creationId xmlns:a16="http://schemas.microsoft.com/office/drawing/2014/main" id="{33B5B6D1-2684-F2F1-E4D0-52EB463770F6}"/>
+              </a:ext>
+            </a:extLst>
+          </p:cNvPr>
+          <p:cNvPicPr>
+            <a:picLocks noChangeAspect="1"/>
+          </p:cNvPicPr>
+          <p:nvPr/>
+        </p:nvPicPr>
+        <p:blipFill>
+          <a:blip r:embed="rId5" cstate="print">
+            <a:extLst>
+              <a:ext uri="{28A0092B-C50C-407E-A947-70E740481C1C}">
+                <a14:useLocalDpi xmlns:a14="http://schemas.microsoft.com/office/drawing/2010/main" val="0"/>
+              </a:ext>
+            </a:extLst>
+          </a:blip>
+          <a:stretch>
+            <a:fillRect/>
+          </a:stretch>
+        </p:blipFill>
+        <p:spPr>
+          <a:xfrm>
+            <a:off x="3066321" y="962023"/>
+            <a:ext cx="5719760" cy="3813173"/>
+          </a:xfrm>
+          <a:prstGeom prst="rect">
+            <a:avLst/>
+          </a:prstGeom>
+        </p:spPr>
+      </p:pic>
     </p:spTree>
     <p:extLst>
       <p:ext uri="{BB962C8B-B14F-4D97-AF65-F5344CB8AC3E}">
         <p14:creationId xmlns:p14="http://schemas.microsoft.com/office/powerpoint/2010/main" val="3537672044"/>
+      </p:ext>
+    </p:extLst>
+  </p:cSld>
+  <p:clrMapOvr>
+    <a:masterClrMapping/>
+  </p:clrMapOvr>
+</p:sld>
+</file>
+
+<file path=ppt/slides/slide2.xml><?xml version="1.0" encoding="utf-8"?>
+<p:sld xmlns:a="http://schemas.openxmlformats.org/drawingml/2006/main" xmlns:r="http://schemas.openxmlformats.org/officeDocument/2006/relationships" xmlns:p="http://schemas.openxmlformats.org/presentationml/2006/main">
+  <p:cSld>
+    <p:bg>
+      <p:bgPr>
+        <a:gradFill>
+          <a:gsLst>
+            <a:gs pos="0">
+              <a:schemeClr val="tx1"/>
+            </a:gs>
+            <a:gs pos="100000">
+              <a:schemeClr val="bg2"/>
+            </a:gs>
+          </a:gsLst>
+          <a:lin ang="5400000" scaled="1"/>
+        </a:gradFill>
+        <a:effectLst/>
+      </p:bgPr>
+    </p:bg>
+    <p:spTree>
+      <p:nvGrpSpPr>
+        <p:cNvPr id="1" name="">
+          <a:extLst>
+            <a:ext uri="{FF2B5EF4-FFF2-40B4-BE49-F238E27FC236}">
+              <a16:creationId xmlns:a16="http://schemas.microsoft.com/office/drawing/2014/main" id="{E8BFB710-6808-0B6D-B23E-14F724428DE1}"/>
+            </a:ext>
+          </a:extLst>
+        </p:cNvPr>
+        <p:cNvGrpSpPr/>
+        <p:nvPr/>
+      </p:nvGrpSpPr>
+      <p:grpSpPr>
+        <a:xfrm>
+          <a:off x="0" y="0"/>
+          <a:ext cx="0" cy="0"/>
+          <a:chOff x="0" y="0"/>
+          <a:chExt cx="0" cy="0"/>
+        </a:xfrm>
+      </p:grpSpPr>
+      <p:pic>
+        <p:nvPicPr>
+          <p:cNvPr id="8" name="Picture 7" descr="A blue and red shapes&#10;&#10;Description automatically generated">
+            <a:extLst>
+              <a:ext uri="{FF2B5EF4-FFF2-40B4-BE49-F238E27FC236}">
+                <a16:creationId xmlns:a16="http://schemas.microsoft.com/office/drawing/2014/main" id="{D7F3777E-792B-4FAA-9633-7D70D3280476}"/>
+              </a:ext>
+            </a:extLst>
+          </p:cNvPr>
+          <p:cNvPicPr>
+            <a:picLocks noChangeAspect="1"/>
+          </p:cNvPicPr>
+          <p:nvPr/>
+        </p:nvPicPr>
+        <p:blipFill>
+          <a:blip r:embed="rId2" cstate="print">
+            <a:extLst>
+              <a:ext uri="{28A0092B-C50C-407E-A947-70E740481C1C}">
+                <a14:useLocalDpi xmlns:a14="http://schemas.microsoft.com/office/drawing/2010/main" val="0"/>
+              </a:ext>
+            </a:extLst>
+          </a:blip>
+          <a:stretch>
+            <a:fillRect/>
+          </a:stretch>
+        </p:blipFill>
+        <p:spPr>
+          <a:xfrm>
+            <a:off x="2428586" y="940094"/>
+            <a:ext cx="6780442" cy="3813999"/>
+          </a:xfrm>
+          <a:prstGeom prst="rect">
+            <a:avLst/>
+          </a:prstGeom>
+        </p:spPr>
+      </p:pic>
+      <p:cxnSp>
+        <p:nvCxnSpPr>
+          <p:cNvPr id="17" name="Straight Arrow Connector 16">
+            <a:extLst>
+              <a:ext uri="{FF2B5EF4-FFF2-40B4-BE49-F238E27FC236}">
+                <a16:creationId xmlns:a16="http://schemas.microsoft.com/office/drawing/2014/main" id="{775AF7EF-7B73-0E71-6431-B2BB7C297E78}"/>
+              </a:ext>
+            </a:extLst>
+          </p:cNvPr>
+          <p:cNvCxnSpPr>
+            <a:cxnSpLocks/>
+          </p:cNvCxnSpPr>
+          <p:nvPr/>
+        </p:nvCxnSpPr>
+        <p:spPr>
+          <a:xfrm flipV="1">
+            <a:off x="7519589" y="1725078"/>
+            <a:ext cx="0" cy="1747098"/>
+          </a:xfrm>
+          <a:prstGeom prst="straightConnector1">
+            <a:avLst/>
+          </a:prstGeom>
+          <a:ln w="127000">
+            <a:gradFill>
+              <a:gsLst>
+                <a:gs pos="0">
+                  <a:schemeClr val="accent1">
+                    <a:lumMod val="5000"/>
+                    <a:lumOff val="95000"/>
+                  </a:schemeClr>
+                </a:gs>
+                <a:gs pos="100000">
+                  <a:srgbClr val="FFC000"/>
+                </a:gs>
+              </a:gsLst>
+              <a:lin ang="5400000" scaled="1"/>
+            </a:gradFill>
+            <a:tailEnd type="triangle"/>
+          </a:ln>
+        </p:spPr>
+        <p:style>
+          <a:lnRef idx="2">
+            <a:schemeClr val="accent1"/>
+          </a:lnRef>
+          <a:fillRef idx="0">
+            <a:schemeClr val="accent1"/>
+          </a:fillRef>
+          <a:effectRef idx="1">
+            <a:schemeClr val="accent1"/>
+          </a:effectRef>
+          <a:fontRef idx="minor">
+            <a:schemeClr val="tx1"/>
+          </a:fontRef>
+        </p:style>
+      </p:cxnSp>
+      <mc:AlternateContent xmlns:mc="http://schemas.openxmlformats.org/markup-compatibility/2006">
+        <mc:Choice xmlns:a14="http://schemas.microsoft.com/office/drawing/2010/main" Requires="a14">
+          <p:sp>
+            <p:nvSpPr>
+              <p:cNvPr id="53" name="TextBox 52">
+                <a:extLst>
+                  <a:ext uri="{FF2B5EF4-FFF2-40B4-BE49-F238E27FC236}">
+                    <a16:creationId xmlns:a16="http://schemas.microsoft.com/office/drawing/2014/main" id="{62BFFD2B-01DE-6E02-4DDE-ACEE1BBE22E6}"/>
+                  </a:ext>
+                </a:extLst>
+              </p:cNvPr>
+              <p:cNvSpPr txBox="1"/>
+              <p:nvPr/>
+            </p:nvSpPr>
+            <p:spPr>
+              <a:xfrm>
+                <a:off x="7634823" y="2442043"/>
+                <a:ext cx="832279" cy="646331"/>
+              </a:xfrm>
+              <a:prstGeom prst="rect">
+                <a:avLst/>
+              </a:prstGeom>
+              <a:noFill/>
+            </p:spPr>
+            <p:txBody>
+              <a:bodyPr wrap="none" rtlCol="0">
+                <a:spAutoFit/>
+              </a:bodyPr>
+              <a:lstStyle/>
+              <a:p>
+                <a:pPr/>
+                <a14:m>
+                  <m:oMathPara xmlns:m="http://schemas.openxmlformats.org/officeDocument/2006/math">
+                    <m:oMathParaPr>
+                      <m:jc m:val="centerGroup"/>
+                    </m:oMathParaPr>
+                    <m:oMath xmlns:m="http://schemas.openxmlformats.org/officeDocument/2006/math">
+                      <m:r>
+                        <a:rPr lang="en-US" sz="3600" b="1" i="1" smtClean="0">
+                          <a:solidFill>
+                            <a:srgbClr val="FF0000"/>
+                          </a:solidFill>
+                          <a:latin typeface="Cambria Math" panose="02040503050406030204" pitchFamily="18" charset="0"/>
+                        </a:rPr>
+                        <m:t>𝒉</m:t>
+                      </m:r>
+                      <m:r>
+                        <a:rPr lang="en-US" sz="3600" b="1" i="1" smtClean="0">
+                          <a:solidFill>
+                            <a:srgbClr val="FF0000"/>
+                          </a:solidFill>
+                          <a:latin typeface="Cambria Math" panose="02040503050406030204" pitchFamily="18" charset="0"/>
+                        </a:rPr>
+                        <m:t>𝝂</m:t>
+                      </m:r>
+                    </m:oMath>
+                  </m:oMathPara>
+                </a14:m>
+                <a:endParaRPr lang="en-US" sz="3600" b="1" dirty="0">
+                  <a:solidFill>
+                    <a:srgbClr val="FF0000"/>
+                  </a:solidFill>
+                </a:endParaRPr>
+              </a:p>
+            </p:txBody>
+          </p:sp>
+        </mc:Choice>
+        <mc:Fallback>
+          <p:sp>
+            <p:nvSpPr>
+              <p:cNvPr id="53" name="TextBox 52">
+                <a:extLst>
+                  <a:ext uri="{FF2B5EF4-FFF2-40B4-BE49-F238E27FC236}">
+                    <a16:creationId xmlns:a16="http://schemas.microsoft.com/office/drawing/2014/main" id="{62BFFD2B-01DE-6E02-4DDE-ACEE1BBE22E6}"/>
+                  </a:ext>
+                </a:extLst>
+              </p:cNvPr>
+              <p:cNvSpPr txBox="1">
+                <a:spLocks noRot="1" noChangeAspect="1" noMove="1" noResize="1" noEditPoints="1" noAdjustHandles="1" noChangeArrowheads="1" noChangeShapeType="1" noTextEdit="1"/>
+              </p:cNvSpPr>
+              <p:nvPr/>
+            </p:nvSpPr>
+            <p:spPr>
+              <a:xfrm>
+                <a:off x="7634823" y="2442043"/>
+                <a:ext cx="832279" cy="646331"/>
+              </a:xfrm>
+              <a:prstGeom prst="rect">
+                <a:avLst/>
+              </a:prstGeom>
+              <a:blipFill>
+                <a:blip r:embed="rId3"/>
+                <a:stretch>
+                  <a:fillRect/>
+                </a:stretch>
+              </a:blipFill>
+            </p:spPr>
+            <p:txBody>
+              <a:bodyPr/>
+              <a:lstStyle/>
+              <a:p>
+                <a:r>
+                  <a:rPr lang="en-US">
+                    <a:noFill/>
+                  </a:rPr>
+                  <a:t> </a:t>
+                </a:r>
+              </a:p>
+            </p:txBody>
+          </p:sp>
+        </mc:Fallback>
+      </mc:AlternateContent>
+      <p:sp>
+        <p:nvSpPr>
+          <p:cNvPr id="22" name="Freeform: Shape 21">
+            <a:extLst>
+              <a:ext uri="{FF2B5EF4-FFF2-40B4-BE49-F238E27FC236}">
+                <a16:creationId xmlns:a16="http://schemas.microsoft.com/office/drawing/2014/main" id="{E02EF85E-78E0-D77D-E663-31D347B02556}"/>
+              </a:ext>
+            </a:extLst>
+          </p:cNvPr>
+          <p:cNvSpPr/>
+          <p:nvPr/>
+        </p:nvSpPr>
+        <p:spPr>
+          <a:xfrm>
+            <a:off x="4047392" y="3698439"/>
+            <a:ext cx="2326921" cy="1060268"/>
+          </a:xfrm>
+          <a:custGeom>
+            <a:avLst/>
+            <a:gdLst>
+              <a:gd name="connsiteX0" fmla="*/ 1235869 w 2326921"/>
+              <a:gd name="connsiteY0" fmla="*/ 0 h 2257425"/>
+              <a:gd name="connsiteX1" fmla="*/ 1578769 w 2326921"/>
+              <a:gd name="connsiteY1" fmla="*/ 600075 h 2257425"/>
+              <a:gd name="connsiteX2" fmla="*/ 2314575 w 2326921"/>
+              <a:gd name="connsiteY2" fmla="*/ 1078706 h 2257425"/>
+              <a:gd name="connsiteX3" fmla="*/ 1950244 w 2326921"/>
+              <a:gd name="connsiteY3" fmla="*/ 1493043 h 2257425"/>
+              <a:gd name="connsiteX4" fmla="*/ 828675 w 2326921"/>
+              <a:gd name="connsiteY4" fmla="*/ 1771650 h 2257425"/>
+              <a:gd name="connsiteX5" fmla="*/ 0 w 2326921"/>
+              <a:gd name="connsiteY5" fmla="*/ 2257425 h 2257425"/>
+            </a:gdLst>
+            <a:ahLst/>
+            <a:cxnLst>
+              <a:cxn ang="0">
+                <a:pos x="connsiteX0" y="connsiteY0"/>
+              </a:cxn>
+              <a:cxn ang="0">
+                <a:pos x="connsiteX1" y="connsiteY1"/>
+              </a:cxn>
+              <a:cxn ang="0">
+                <a:pos x="connsiteX2" y="connsiteY2"/>
+              </a:cxn>
+              <a:cxn ang="0">
+                <a:pos x="connsiteX3" y="connsiteY3"/>
+              </a:cxn>
+              <a:cxn ang="0">
+                <a:pos x="connsiteX4" y="connsiteY4"/>
+              </a:cxn>
+              <a:cxn ang="0">
+                <a:pos x="connsiteX5" y="connsiteY5"/>
+              </a:cxn>
+            </a:cxnLst>
+            <a:rect l="l" t="t" r="r" b="b"/>
+            <a:pathLst>
+              <a:path w="2326921" h="2257425">
+                <a:moveTo>
+                  <a:pt x="1235869" y="0"/>
+                </a:moveTo>
+                <a:cubicBezTo>
+                  <a:pt x="1317427" y="210145"/>
+                  <a:pt x="1398985" y="420291"/>
+                  <a:pt x="1578769" y="600075"/>
+                </a:cubicBezTo>
+                <a:cubicBezTo>
+                  <a:pt x="1758553" y="779859"/>
+                  <a:pt x="2252663" y="929878"/>
+                  <a:pt x="2314575" y="1078706"/>
+                </a:cubicBezTo>
+                <a:cubicBezTo>
+                  <a:pt x="2376487" y="1227534"/>
+                  <a:pt x="2197894" y="1377552"/>
+                  <a:pt x="1950244" y="1493043"/>
+                </a:cubicBezTo>
+                <a:cubicBezTo>
+                  <a:pt x="1702594" y="1608534"/>
+                  <a:pt x="1153716" y="1644253"/>
+                  <a:pt x="828675" y="1771650"/>
+                </a:cubicBezTo>
+                <a:cubicBezTo>
+                  <a:pt x="503634" y="1899047"/>
+                  <a:pt x="251817" y="2078236"/>
+                  <a:pt x="0" y="2257425"/>
+                </a:cubicBezTo>
+              </a:path>
+            </a:pathLst>
+          </a:custGeom>
+          <a:noFill/>
+          <a:ln w="101600">
+            <a:solidFill>
+              <a:schemeClr val="tx1">
+                <a:lumMod val="85000"/>
+                <a:lumOff val="15000"/>
+              </a:schemeClr>
+            </a:solidFill>
+          </a:ln>
+        </p:spPr>
+        <p:style>
+          <a:lnRef idx="2">
+            <a:schemeClr val="accent1">
+              <a:shade val="15000"/>
+            </a:schemeClr>
+          </a:lnRef>
+          <a:fillRef idx="1">
+            <a:schemeClr val="accent1"/>
+          </a:fillRef>
+          <a:effectRef idx="0">
+            <a:schemeClr val="accent1"/>
+          </a:effectRef>
+          <a:fontRef idx="minor">
+            <a:schemeClr val="lt1"/>
+          </a:fontRef>
+        </p:style>
+        <p:txBody>
+          <a:bodyPr rtlCol="0" anchor="ctr"/>
+          <a:lstStyle/>
+          <a:p>
+            <a:pPr algn="ctr"/>
+            <a:endParaRPr lang="en-US"/>
+          </a:p>
+        </p:txBody>
+      </p:sp>
+      <p:cxnSp>
+        <p:nvCxnSpPr>
+          <p:cNvPr id="33" name="Straight Arrow Connector 32">
+            <a:extLst>
+              <a:ext uri="{FF2B5EF4-FFF2-40B4-BE49-F238E27FC236}">
+                <a16:creationId xmlns:a16="http://schemas.microsoft.com/office/drawing/2014/main" id="{7FC7E593-E31C-55FA-9435-91FA776D0BB4}"/>
+              </a:ext>
+            </a:extLst>
+          </p:cNvPr>
+          <p:cNvCxnSpPr>
+            <a:cxnSpLocks/>
+          </p:cNvCxnSpPr>
+          <p:nvPr/>
+        </p:nvCxnSpPr>
+        <p:spPr>
+          <a:xfrm flipH="1">
+            <a:off x="6786334" y="1792706"/>
+            <a:ext cx="409953" cy="176915"/>
+          </a:xfrm>
+          <a:prstGeom prst="straightConnector1">
+            <a:avLst/>
+          </a:prstGeom>
+          <a:ln w="101600">
+            <a:solidFill>
+              <a:schemeClr val="tx1">
+                <a:lumMod val="85000"/>
+                <a:lumOff val="15000"/>
+              </a:schemeClr>
+            </a:solidFill>
+            <a:tailEnd type="triangle"/>
+          </a:ln>
+        </p:spPr>
+        <p:style>
+          <a:lnRef idx="2">
+            <a:schemeClr val="accent1"/>
+          </a:lnRef>
+          <a:fillRef idx="0">
+            <a:schemeClr val="accent1"/>
+          </a:fillRef>
+          <a:effectRef idx="1">
+            <a:schemeClr val="accent1"/>
+          </a:effectRef>
+          <a:fontRef idx="minor">
+            <a:schemeClr val="tx1"/>
+          </a:fontRef>
+        </p:style>
+      </p:cxnSp>
+      <p:cxnSp>
+        <p:nvCxnSpPr>
+          <p:cNvPr id="41" name="Straight Arrow Connector 40">
+            <a:extLst>
+              <a:ext uri="{FF2B5EF4-FFF2-40B4-BE49-F238E27FC236}">
+                <a16:creationId xmlns:a16="http://schemas.microsoft.com/office/drawing/2014/main" id="{7DEBDE49-5BCB-93CA-EF45-7C05B54D9032}"/>
+              </a:ext>
+            </a:extLst>
+          </p:cNvPr>
+          <p:cNvCxnSpPr>
+            <a:cxnSpLocks/>
+          </p:cNvCxnSpPr>
+          <p:nvPr/>
+        </p:nvCxnSpPr>
+        <p:spPr>
+          <a:xfrm flipH="1">
+            <a:off x="4682330" y="2553303"/>
+            <a:ext cx="583516" cy="865131"/>
+          </a:xfrm>
+          <a:prstGeom prst="straightConnector1">
+            <a:avLst/>
+          </a:prstGeom>
+          <a:ln w="101600">
+            <a:solidFill>
+              <a:schemeClr val="tx1">
+                <a:lumMod val="85000"/>
+                <a:lumOff val="15000"/>
+              </a:schemeClr>
+            </a:solidFill>
+            <a:tailEnd type="triangle"/>
+          </a:ln>
+        </p:spPr>
+        <p:style>
+          <a:lnRef idx="2">
+            <a:schemeClr val="accent1"/>
+          </a:lnRef>
+          <a:fillRef idx="0">
+            <a:schemeClr val="accent1"/>
+          </a:fillRef>
+          <a:effectRef idx="1">
+            <a:schemeClr val="accent1"/>
+          </a:effectRef>
+          <a:fontRef idx="minor">
+            <a:schemeClr val="tx1"/>
+          </a:fontRef>
+        </p:style>
+      </p:cxnSp>
+      <p:cxnSp>
+        <p:nvCxnSpPr>
+          <p:cNvPr id="45" name="Straight Arrow Connector 44">
+            <a:extLst>
+              <a:ext uri="{FF2B5EF4-FFF2-40B4-BE49-F238E27FC236}">
+                <a16:creationId xmlns:a16="http://schemas.microsoft.com/office/drawing/2014/main" id="{F2850F32-F97B-4137-379D-D541FA70F191}"/>
+              </a:ext>
+            </a:extLst>
+          </p:cNvPr>
+          <p:cNvCxnSpPr>
+            <a:cxnSpLocks/>
+            <a:stCxn id="22" idx="1"/>
+          </p:cNvCxnSpPr>
+          <p:nvPr/>
+        </p:nvCxnSpPr>
+        <p:spPr>
+          <a:xfrm>
+            <a:off x="5626161" y="3980282"/>
+            <a:ext cx="573004" cy="163406"/>
+          </a:xfrm>
+          <a:prstGeom prst="straightConnector1">
+            <a:avLst/>
+          </a:prstGeom>
+          <a:ln w="101600">
+            <a:solidFill>
+              <a:schemeClr val="tx1">
+                <a:lumMod val="85000"/>
+                <a:lumOff val="15000"/>
+              </a:schemeClr>
+            </a:solidFill>
+            <a:tailEnd type="triangle"/>
+          </a:ln>
+        </p:spPr>
+        <p:style>
+          <a:lnRef idx="2">
+            <a:schemeClr val="accent1"/>
+          </a:lnRef>
+          <a:fillRef idx="0">
+            <a:schemeClr val="accent1"/>
+          </a:fillRef>
+          <a:effectRef idx="1">
+            <a:schemeClr val="accent1"/>
+          </a:effectRef>
+          <a:fontRef idx="minor">
+            <a:schemeClr val="tx1"/>
+          </a:fontRef>
+        </p:style>
+      </p:cxnSp>
+      <p:cxnSp>
+        <p:nvCxnSpPr>
+          <p:cNvPr id="48" name="Straight Arrow Connector 47">
+            <a:extLst>
+              <a:ext uri="{FF2B5EF4-FFF2-40B4-BE49-F238E27FC236}">
+                <a16:creationId xmlns:a16="http://schemas.microsoft.com/office/drawing/2014/main" id="{239C7C14-41C5-FD86-1D67-D56C7A5DF855}"/>
+              </a:ext>
+            </a:extLst>
+          </p:cNvPr>
+          <p:cNvCxnSpPr>
+            <a:cxnSpLocks/>
+          </p:cNvCxnSpPr>
+          <p:nvPr/>
+        </p:nvCxnSpPr>
+        <p:spPr>
+          <a:xfrm flipH="1">
+            <a:off x="4038663" y="4580752"/>
+            <a:ext cx="595719" cy="182564"/>
+          </a:xfrm>
+          <a:prstGeom prst="straightConnector1">
+            <a:avLst/>
+          </a:prstGeom>
+          <a:ln w="101600">
+            <a:solidFill>
+              <a:schemeClr val="tx1">
+                <a:lumMod val="85000"/>
+                <a:lumOff val="15000"/>
+              </a:schemeClr>
+            </a:solidFill>
+            <a:tailEnd type="triangle"/>
+          </a:ln>
+        </p:spPr>
+        <p:style>
+          <a:lnRef idx="2">
+            <a:schemeClr val="accent1"/>
+          </a:lnRef>
+          <a:fillRef idx="0">
+            <a:schemeClr val="accent1"/>
+          </a:fillRef>
+          <a:effectRef idx="1">
+            <a:schemeClr val="accent1"/>
+          </a:effectRef>
+          <a:fontRef idx="minor">
+            <a:schemeClr val="tx1"/>
+          </a:fontRef>
+        </p:style>
+      </p:cxnSp>
+      <p:cxnSp>
+        <p:nvCxnSpPr>
+          <p:cNvPr id="50" name="Straight Arrow Connector 49">
+            <a:extLst>
+              <a:ext uri="{FF2B5EF4-FFF2-40B4-BE49-F238E27FC236}">
+                <a16:creationId xmlns:a16="http://schemas.microsoft.com/office/drawing/2014/main" id="{EEEFB087-1974-184F-6D41-A16F68EBD52F}"/>
+              </a:ext>
+            </a:extLst>
+          </p:cNvPr>
+          <p:cNvCxnSpPr>
+            <a:cxnSpLocks/>
+          </p:cNvCxnSpPr>
+          <p:nvPr/>
+        </p:nvCxnSpPr>
+        <p:spPr>
+          <a:xfrm flipH="1">
+            <a:off x="4047392" y="3707662"/>
+            <a:ext cx="341062" cy="647710"/>
+          </a:xfrm>
+          <a:prstGeom prst="straightConnector1">
+            <a:avLst/>
+          </a:prstGeom>
+          <a:ln w="101600">
+            <a:solidFill>
+              <a:schemeClr val="tx1">
+                <a:lumMod val="85000"/>
+                <a:lumOff val="15000"/>
+              </a:schemeClr>
+            </a:solidFill>
+            <a:tailEnd type="triangle"/>
+          </a:ln>
+        </p:spPr>
+        <p:style>
+          <a:lnRef idx="2">
+            <a:schemeClr val="accent1"/>
+          </a:lnRef>
+          <a:fillRef idx="0">
+            <a:schemeClr val="accent1"/>
+          </a:fillRef>
+          <a:effectRef idx="1">
+            <a:schemeClr val="accent1"/>
+          </a:effectRef>
+          <a:fontRef idx="minor">
+            <a:schemeClr val="tx1"/>
+          </a:fontRef>
+        </p:style>
+      </p:cxnSp>
+      <p:cxnSp>
+        <p:nvCxnSpPr>
+          <p:cNvPr id="23" name="Straight Arrow Connector 22">
+            <a:extLst>
+              <a:ext uri="{FF2B5EF4-FFF2-40B4-BE49-F238E27FC236}">
+                <a16:creationId xmlns:a16="http://schemas.microsoft.com/office/drawing/2014/main" id="{1D412CED-3565-03B0-2CC1-2E900A1CD82F}"/>
+              </a:ext>
+            </a:extLst>
+          </p:cNvPr>
+          <p:cNvCxnSpPr>
+            <a:cxnSpLocks/>
+          </p:cNvCxnSpPr>
+          <p:nvPr/>
+        </p:nvCxnSpPr>
+        <p:spPr>
+          <a:xfrm flipH="1">
+            <a:off x="5580918" y="2064766"/>
+            <a:ext cx="461443" cy="257993"/>
+          </a:xfrm>
+          <a:prstGeom prst="straightConnector1">
+            <a:avLst/>
+          </a:prstGeom>
+          <a:ln w="101600">
+            <a:solidFill>
+              <a:schemeClr val="tx1">
+                <a:lumMod val="85000"/>
+                <a:lumOff val="15000"/>
+              </a:schemeClr>
+            </a:solidFill>
+            <a:tailEnd type="triangle"/>
+          </a:ln>
+        </p:spPr>
+        <p:style>
+          <a:lnRef idx="2">
+            <a:schemeClr val="accent1"/>
+          </a:lnRef>
+          <a:fillRef idx="0">
+            <a:schemeClr val="accent1"/>
+          </a:fillRef>
+          <a:effectRef idx="1">
+            <a:schemeClr val="accent1"/>
+          </a:effectRef>
+          <a:fontRef idx="minor">
+            <a:schemeClr val="tx1"/>
+          </a:fontRef>
+        </p:style>
+      </p:cxnSp>
+      <p:pic>
+        <p:nvPicPr>
+          <p:cNvPr id="44" name="Picture 43">
+            <a:extLst>
+              <a:ext uri="{FF2B5EF4-FFF2-40B4-BE49-F238E27FC236}">
+                <a16:creationId xmlns:a16="http://schemas.microsoft.com/office/drawing/2014/main" id="{7765FEDB-A92B-311B-D488-9FF5BF5DDC1E}"/>
+              </a:ext>
+            </a:extLst>
+          </p:cNvPr>
+          <p:cNvPicPr>
+            <a:picLocks noChangeAspect="1"/>
+          </p:cNvPicPr>
+          <p:nvPr/>
+        </p:nvPicPr>
+        <p:blipFill>
+          <a:blip r:embed="rId4">
+            <a:extLst>
+              <a:ext uri="{28A0092B-C50C-407E-A947-70E740481C1C}">
+                <a14:useLocalDpi xmlns:a14="http://schemas.microsoft.com/office/drawing/2010/main" val="0"/>
+              </a:ext>
+            </a:extLst>
+          </a:blip>
+          <a:srcRect l="54797" t="25163" r="2215" b="33883"/>
+          <a:stretch>
+            <a:fillRect/>
+          </a:stretch>
+        </p:blipFill>
+        <p:spPr>
+          <a:xfrm>
+            <a:off x="34246" y="3040171"/>
+            <a:ext cx="2848163" cy="1808958"/>
+          </a:xfrm>
+          <a:prstGeom prst="rect">
+            <a:avLst/>
+          </a:prstGeom>
+        </p:spPr>
+      </p:pic>
+      <p:pic>
+        <p:nvPicPr>
+          <p:cNvPr id="46" name="Picture 45">
+            <a:extLst>
+              <a:ext uri="{FF2B5EF4-FFF2-40B4-BE49-F238E27FC236}">
+                <a16:creationId xmlns:a16="http://schemas.microsoft.com/office/drawing/2014/main" id="{EAC2E5DE-3787-4EAB-2DD5-47696126DFB8}"/>
+              </a:ext>
+            </a:extLst>
+          </p:cNvPr>
+          <p:cNvPicPr>
+            <a:picLocks noChangeAspect="1"/>
+          </p:cNvPicPr>
+          <p:nvPr/>
+        </p:nvPicPr>
+        <p:blipFill>
+          <a:blip r:embed="rId4">
+            <a:extLst>
+              <a:ext uri="{28A0092B-C50C-407E-A947-70E740481C1C}">
+                <a14:useLocalDpi xmlns:a14="http://schemas.microsoft.com/office/drawing/2010/main" val="0"/>
+              </a:ext>
+            </a:extLst>
+          </a:blip>
+          <a:srcRect l="9395" t="25163" r="53117" b="33883"/>
+          <a:stretch>
+            <a:fillRect/>
+          </a:stretch>
+        </p:blipFill>
+        <p:spPr>
+          <a:xfrm>
+            <a:off x="9194693" y="935011"/>
+            <a:ext cx="2841096" cy="2069219"/>
+          </a:xfrm>
+          <a:prstGeom prst="rect">
+            <a:avLst/>
+          </a:prstGeom>
+        </p:spPr>
+      </p:pic>
+    </p:spTree>
+    <p:extLst>
+      <p:ext uri="{BB962C8B-B14F-4D97-AF65-F5344CB8AC3E}">
+        <p14:creationId xmlns:p14="http://schemas.microsoft.com/office/powerpoint/2010/main" val="3366137346"/>
       </p:ext>
     </p:extLst>
   </p:cSld>
